--- a/p02/A-frame-geometric-objects.pptx
+++ b/p02/A-frame-geometric-objects.pptx
@@ -222,7 +222,7 @@
           <a:p>
             <a:fld id="{FA1E3CD0-6E24-4AC0-945A-82AEC1490673}" type="datetimeFigureOut">
               <a:rPr lang="en-US" smtClean="0"/>
-              <a:t>10/24/2025</a:t>
+              <a:t>1/6/2026</a:t>
             </a:fld>
             <a:endParaRPr lang="en-US"/>
           </a:p>
@@ -1023,7 +1023,7 @@
           <a:p>
             <a:fld id="{846CE7D5-CF57-46EF-B807-FDD0502418D4}" type="datetimeFigureOut">
               <a:rPr lang="en-US" smtClean="0"/>
-              <a:t>10/24/2025</a:t>
+              <a:t>1/6/2026</a:t>
             </a:fld>
             <a:endParaRPr lang="en-US"/>
           </a:p>
@@ -1193,7 +1193,7 @@
           <a:p>
             <a:fld id="{846CE7D5-CF57-46EF-B807-FDD0502418D4}" type="datetimeFigureOut">
               <a:rPr lang="en-US" smtClean="0"/>
-              <a:t>10/24/2025</a:t>
+              <a:t>1/6/2026</a:t>
             </a:fld>
             <a:endParaRPr lang="en-US"/>
           </a:p>
@@ -1373,7 +1373,7 @@
           <a:p>
             <a:fld id="{846CE7D5-CF57-46EF-B807-FDD0502418D4}" type="datetimeFigureOut">
               <a:rPr lang="en-US" smtClean="0"/>
-              <a:t>10/24/2025</a:t>
+              <a:t>1/6/2026</a:t>
             </a:fld>
             <a:endParaRPr lang="en-US"/>
           </a:p>
@@ -1543,7 +1543,7 @@
           <a:p>
             <a:fld id="{846CE7D5-CF57-46EF-B807-FDD0502418D4}" type="datetimeFigureOut">
               <a:rPr lang="en-US" smtClean="0"/>
-              <a:t>10/24/2025</a:t>
+              <a:t>1/6/2026</a:t>
             </a:fld>
             <a:endParaRPr lang="en-US"/>
           </a:p>
@@ -1789,7 +1789,7 @@
           <a:p>
             <a:fld id="{846CE7D5-CF57-46EF-B807-FDD0502418D4}" type="datetimeFigureOut">
               <a:rPr lang="en-US" smtClean="0"/>
-              <a:t>10/24/2025</a:t>
+              <a:t>1/6/2026</a:t>
             </a:fld>
             <a:endParaRPr lang="en-US"/>
           </a:p>
@@ -2021,7 +2021,7 @@
           <a:p>
             <a:fld id="{846CE7D5-CF57-46EF-B807-FDD0502418D4}" type="datetimeFigureOut">
               <a:rPr lang="en-US" smtClean="0"/>
-              <a:t>10/24/2025</a:t>
+              <a:t>1/6/2026</a:t>
             </a:fld>
             <a:endParaRPr lang="en-US"/>
           </a:p>
@@ -2388,7 +2388,7 @@
           <a:p>
             <a:fld id="{846CE7D5-CF57-46EF-B807-FDD0502418D4}" type="datetimeFigureOut">
               <a:rPr lang="en-US" smtClean="0"/>
-              <a:t>10/24/2025</a:t>
+              <a:t>1/6/2026</a:t>
             </a:fld>
             <a:endParaRPr lang="en-US"/>
           </a:p>
@@ -2506,7 +2506,7 @@
           <a:p>
             <a:fld id="{846CE7D5-CF57-46EF-B807-FDD0502418D4}" type="datetimeFigureOut">
               <a:rPr lang="en-US" smtClean="0"/>
-              <a:t>10/24/2025</a:t>
+              <a:t>1/6/2026</a:t>
             </a:fld>
             <a:endParaRPr lang="en-US"/>
           </a:p>
@@ -2601,7 +2601,7 @@
           <a:p>
             <a:fld id="{846CE7D5-CF57-46EF-B807-FDD0502418D4}" type="datetimeFigureOut">
               <a:rPr lang="en-US" smtClean="0"/>
-              <a:t>10/24/2025</a:t>
+              <a:t>1/6/2026</a:t>
             </a:fld>
             <a:endParaRPr lang="en-US"/>
           </a:p>
@@ -2878,7 +2878,7 @@
           <a:p>
             <a:fld id="{846CE7D5-CF57-46EF-B807-FDD0502418D4}" type="datetimeFigureOut">
               <a:rPr lang="en-US" smtClean="0"/>
-              <a:t>10/24/2025</a:t>
+              <a:t>1/6/2026</a:t>
             </a:fld>
             <a:endParaRPr lang="en-US"/>
           </a:p>
@@ -3135,7 +3135,7 @@
           <a:p>
             <a:fld id="{846CE7D5-CF57-46EF-B807-FDD0502418D4}" type="datetimeFigureOut">
               <a:rPr lang="en-US" smtClean="0"/>
-              <a:t>10/24/2025</a:t>
+              <a:t>1/6/2026</a:t>
             </a:fld>
             <a:endParaRPr lang="en-US"/>
           </a:p>
@@ -3348,7 +3348,7 @@
           <a:p>
             <a:fld id="{846CE7D5-CF57-46EF-B807-FDD0502418D4}" type="datetimeFigureOut">
               <a:rPr lang="en-US" smtClean="0"/>
-              <a:t>10/24/2025</a:t>
+              <a:t>1/6/2026</a:t>
             </a:fld>
             <a:endParaRPr lang="en-US"/>
           </a:p>
